--- a/資料/ゲーム企画書_4GA3_遠藤直樹.pptx
+++ b/資料/ゲーム企画書_4GA3_遠藤直樹.pptx
@@ -107,6 +107,11 @@
       </a:defRPr>
     </a:lvl9pPr>
   </p:defaultTextStyle>
+  <p:extLst>
+    <p:ext uri="{EFAFB233-063F-42B5-8137-9DF3F51BA10A}">
+      <p15:sldGuideLst xmlns:p15="http://schemas.microsoft.com/office/powerpoint/2012/main"/>
+    </p:ext>
+  </p:extLst>
 </p:presentation>
 </file>
 
@@ -257,7 +262,7 @@
           <a:p>
             <a:fld id="{28E75935-BC27-41EE-9206-7418E38C946F}" type="datetimeFigureOut">
               <a:rPr kumimoji="1" lang="ja-JP" altLang="en-US" smtClean="0"/>
-              <a:t>2026/9/19</a:t>
+              <a:t>2026/9/20</a:t>
             </a:fld>
             <a:endParaRPr kumimoji="1" lang="ja-JP" altLang="en-US"/>
           </a:p>
@@ -487,7 +492,7 @@
           <a:p>
             <a:fld id="{28E75935-BC27-41EE-9206-7418E38C946F}" type="datetimeFigureOut">
               <a:rPr kumimoji="1" lang="ja-JP" altLang="en-US" smtClean="0"/>
-              <a:t>2026/9/19</a:t>
+              <a:t>2026/9/20</a:t>
             </a:fld>
             <a:endParaRPr kumimoji="1" lang="ja-JP" altLang="en-US"/>
           </a:p>
@@ -727,7 +732,7 @@
           <a:p>
             <a:fld id="{28E75935-BC27-41EE-9206-7418E38C946F}" type="datetimeFigureOut">
               <a:rPr kumimoji="1" lang="ja-JP" altLang="en-US" smtClean="0"/>
-              <a:t>2026/9/19</a:t>
+              <a:t>2026/9/20</a:t>
             </a:fld>
             <a:endParaRPr kumimoji="1" lang="ja-JP" altLang="en-US"/>
           </a:p>
@@ -957,7 +962,7 @@
           <a:p>
             <a:fld id="{28E75935-BC27-41EE-9206-7418E38C946F}" type="datetimeFigureOut">
               <a:rPr kumimoji="1" lang="ja-JP" altLang="en-US" smtClean="0"/>
-              <a:t>2026/9/19</a:t>
+              <a:t>2026/9/20</a:t>
             </a:fld>
             <a:endParaRPr kumimoji="1" lang="ja-JP" altLang="en-US"/>
           </a:p>
@@ -1232,7 +1237,7 @@
           <a:p>
             <a:fld id="{28E75935-BC27-41EE-9206-7418E38C946F}" type="datetimeFigureOut">
               <a:rPr kumimoji="1" lang="ja-JP" altLang="en-US" smtClean="0"/>
-              <a:t>2026/9/19</a:t>
+              <a:t>2026/9/20</a:t>
             </a:fld>
             <a:endParaRPr kumimoji="1" lang="ja-JP" altLang="en-US"/>
           </a:p>
@@ -1561,7 +1566,7 @@
           <a:p>
             <a:fld id="{28E75935-BC27-41EE-9206-7418E38C946F}" type="datetimeFigureOut">
               <a:rPr kumimoji="1" lang="ja-JP" altLang="en-US" smtClean="0"/>
-              <a:t>2026/9/19</a:t>
+              <a:t>2026/9/20</a:t>
             </a:fld>
             <a:endParaRPr kumimoji="1" lang="ja-JP" altLang="en-US"/>
           </a:p>
@@ -2037,7 +2042,7 @@
           <a:p>
             <a:fld id="{28E75935-BC27-41EE-9206-7418E38C946F}" type="datetimeFigureOut">
               <a:rPr kumimoji="1" lang="ja-JP" altLang="en-US" smtClean="0"/>
-              <a:t>2026/9/19</a:t>
+              <a:t>2026/9/20</a:t>
             </a:fld>
             <a:endParaRPr kumimoji="1" lang="ja-JP" altLang="en-US"/>
           </a:p>
@@ -2178,7 +2183,7 @@
           <a:p>
             <a:fld id="{28E75935-BC27-41EE-9206-7418E38C946F}" type="datetimeFigureOut">
               <a:rPr kumimoji="1" lang="ja-JP" altLang="en-US" smtClean="0"/>
-              <a:t>2026/9/19</a:t>
+              <a:t>2026/9/20</a:t>
             </a:fld>
             <a:endParaRPr kumimoji="1" lang="ja-JP" altLang="en-US"/>
           </a:p>
@@ -2291,7 +2296,7 @@
           <a:p>
             <a:fld id="{28E75935-BC27-41EE-9206-7418E38C946F}" type="datetimeFigureOut">
               <a:rPr kumimoji="1" lang="ja-JP" altLang="en-US" smtClean="0"/>
-              <a:t>2026/9/19</a:t>
+              <a:t>2026/9/20</a:t>
             </a:fld>
             <a:endParaRPr kumimoji="1" lang="ja-JP" altLang="en-US"/>
           </a:p>
@@ -2634,7 +2639,7 @@
           <a:p>
             <a:fld id="{28E75935-BC27-41EE-9206-7418E38C946F}" type="datetimeFigureOut">
               <a:rPr kumimoji="1" lang="ja-JP" altLang="en-US" smtClean="0"/>
-              <a:t>2026/9/19</a:t>
+              <a:t>2026/9/20</a:t>
             </a:fld>
             <a:endParaRPr kumimoji="1" lang="ja-JP" altLang="en-US"/>
           </a:p>
@@ -2922,7 +2927,7 @@
           <a:p>
             <a:fld id="{28E75935-BC27-41EE-9206-7418E38C946F}" type="datetimeFigureOut">
               <a:rPr kumimoji="1" lang="ja-JP" altLang="en-US" smtClean="0"/>
-              <a:t>2026/9/19</a:t>
+              <a:t>2026/9/20</a:t>
             </a:fld>
             <a:endParaRPr kumimoji="1" lang="ja-JP" altLang="en-US"/>
           </a:p>
@@ -3195,7 +3200,7 @@
           <a:p>
             <a:fld id="{28E75935-BC27-41EE-9206-7418E38C946F}" type="datetimeFigureOut">
               <a:rPr kumimoji="1" lang="ja-JP" altLang="en-US" smtClean="0"/>
-              <a:t>2026/9/19</a:t>
+              <a:t>2026/9/20</a:t>
             </a:fld>
             <a:endParaRPr kumimoji="1" lang="ja-JP" altLang="en-US"/>
           </a:p>
@@ -3626,8 +3631,8 @@
         </p:nvSpPr>
         <p:spPr>
           <a:xfrm>
-            <a:off x="1644073" y="831273"/>
-            <a:ext cx="8876145" cy="369332"/>
+            <a:off x="1117601" y="434109"/>
+            <a:ext cx="10123054" cy="1569660"/>
           </a:xfrm>
           <a:prstGeom prst="rect">
             <a:avLst/>
@@ -3640,23 +3645,28 @@
           </a:bodyPr>
           <a:lstStyle/>
           <a:p>
-            <a:r>
-              <a:rPr kumimoji="1" lang="ja-JP" altLang="en-US" dirty="0"/>
+            <a:pPr algn="ctr"/>
+            <a:r>
+              <a:rPr kumimoji="1" lang="ja-JP" altLang="en-US" sz="4800" dirty="0"/>
               <a:t>まりもん</a:t>
             </a:r>
-            <a:r>
-              <a:rPr kumimoji="1" lang="en-US" altLang="ja-JP" dirty="0"/>
+            <a:endParaRPr kumimoji="1" lang="en-US" altLang="ja-JP" sz="4800" dirty="0"/>
+          </a:p>
+          <a:p>
+            <a:pPr algn="ctr"/>
+            <a:r>
+              <a:rPr kumimoji="1" lang="en-US" altLang="ja-JP" sz="4800" dirty="0"/>
               <a:t>~</a:t>
             </a:r>
             <a:r>
-              <a:rPr kumimoji="1" lang="ja-JP" altLang="en-US" dirty="0"/>
+              <a:rPr kumimoji="1" lang="ja-JP" altLang="en-US" sz="4800" dirty="0"/>
               <a:t>まりあ様と不思議なモンスター</a:t>
             </a:r>
             <a:r>
-              <a:rPr kumimoji="1" lang="en-US" altLang="ja-JP" dirty="0"/>
+              <a:rPr kumimoji="1" lang="en-US" altLang="ja-JP" sz="4800" dirty="0"/>
               <a:t>~</a:t>
             </a:r>
-            <a:endParaRPr kumimoji="1" lang="ja-JP" altLang="en-US" dirty="0"/>
+            <a:endParaRPr kumimoji="1" lang="ja-JP" altLang="en-US" sz="4800" dirty="0"/>
           </a:p>
         </p:txBody>
       </p:sp>
